--- a/status/CKO_status_18-08.pptx
+++ b/status/CKO_status_18-08.pptx
@@ -3133,7 +3133,7 @@
       <p:grpSpPr/>
       <p:pic>
         <p:nvPicPr>
-          <p:cNvPr id="2" name="Picture 1" descr="slide2_v6.png"/>
+          <p:cNvPr id="2" name="Picture 1" descr="slide2_v7.png"/>
           <p:cNvPicPr>
             <a:picLocks noChangeAspect="1"/>
           </p:cNvPicPr>

--- a/status/CKO_status_18-08.pptx
+++ b/status/CKO_status_18-08.pptx
@@ -3133,7 +3133,7 @@
       <p:grpSpPr/>
       <p:pic>
         <p:nvPicPr>
-          <p:cNvPr id="2" name="Picture 1" descr="slide2_v7.png"/>
+          <p:cNvPr id="2" name="Picture 1" descr="slide2_v8.png"/>
           <p:cNvPicPr>
             <a:picLocks noChangeAspect="1"/>
           </p:cNvPicPr>

--- a/status/CKO_status_18-08.pptx
+++ b/status/CKO_status_18-08.pptx
@@ -3133,7 +3133,7 @@
       <p:grpSpPr/>
       <p:pic>
         <p:nvPicPr>
-          <p:cNvPr id="2" name="Picture 1" descr="slide2_v8.png"/>
+          <p:cNvPr id="2" name="Picture 1" descr="slide2_v9.png"/>
           <p:cNvPicPr>
             <a:picLocks noChangeAspect="1"/>
           </p:cNvPicPr>
